--- a/docs/person_a_slides.pptx
+++ b/docs/person_a_slides.pptx
@@ -3208,7 +3208,7 @@
               <a:defRPr sz="2000"/>
             </a:pPr>
             <a:r>
-              <a:t>Linear Regression:  RMSLE 1.050 | RMSE 119.5 | R2 0.706</a:t>
+              <a:t>Linear Regression:  RMSLE 1.045 | RMSE 121.1 | R2 0.698</a:t>
             </a:r>
           </a:p>
           <a:p>
@@ -3216,7 +3216,7 @@
               <a:defRPr sz="2000"/>
             </a:pPr>
             <a:r>
-              <a:t>Random Forest:      RMSLE 0.410 | RMSE  79.7 | R2 0.869</a:t>
+              <a:t>Random Forest:      RMSLE 0.410 | RMSE  80.0 | R2 0.868</a:t>
             </a:r>
           </a:p>
           <a:p>
@@ -3224,7 +3224,7 @@
               <a:defRPr sz="2000"/>
             </a:pPr>
             <a:r>
-              <a:t>Best RF params: max_depth=None, n_estimators=400, min_samples_leaf=1</a:t>
+              <a:t>Best RF params: max_depth=18, n_estimators=400, min_samples_leaf=1</a:t>
             </a:r>
           </a:p>
           <a:p>
